--- a/qazaqcode/public/investors/QazaqCode-pitch.pptx
+++ b/qazaqcode/public/investors/QazaqCode-pitch.pptx
@@ -232,13 +232,13 @@
                 <c:formatCode>General</c:formatCode>
                 <c:ptCount val="3"/>
                 <c:pt idx="0">
-                  <c:v>131</c:v>
+                  <c:v>172</c:v>
                 </c:pt>
                 <c:pt idx="1">
-                  <c:v>85</c:v>
+                  <c:v>165</c:v>
                 </c:pt>
                 <c:pt idx="2">
-                  <c:v>72</c:v>
+                  <c:v>138</c:v>
                 </c:pt>
               </c:numCache>
             </c:numRef>
@@ -315,13 +315,13 @@
                 <c:formatCode>General</c:formatCode>
                 <c:ptCount val="3"/>
                 <c:pt idx="0">
-                  <c:v>134</c:v>
+                  <c:v>176</c:v>
                 </c:pt>
                 <c:pt idx="1">
-                  <c:v>136</c:v>
+                  <c:v>165</c:v>
                 </c:pt>
                 <c:pt idx="2">
-                  <c:v>51</c:v>
+                  <c:v>98</c:v>
                 </c:pt>
               </c:numCache>
             </c:numRef>
@@ -1849,7 +1849,7 @@
           <a:p>
             <a:r>
               <a:rPr lang="en-US" dirty="0"/>
-              <a:t>Барлық сан репо мен тесттен: scripts/dataroom.mjs --json. Жолдар: src 10 119 жол, тест коды 6 034 жол. Диаграмма статикалық санау (test()/it() шақырулары), циклмен жасалған тесттер бір рет есептелген, сондықтан соңғы жергілікті жүгіру саны (131 e2e, 85 db, 72 unit) көп. Сұрақ: 'CI-да жасыл ма?' - нәтижесін GitHub Actions-та қарап растау керек, бұл деректе дәлелденбеген. Сұрақ: 'Тәуелсіз аудит?' - жоқ, тек ішкі аудит (20 мәселе түзетілген).</a:t>
+              <a:t>Барлық сан репо мен тесттен: scripts/dataroom.mjs --json. Жолдар: src 15 592 жол, тест коды 8 044 жол. Диаграмма статикалық санау (test()/it() шақырулары), циклмен жасалған тесттер бір рет есептелген, сондықтан соңғы жергілікті жүгіру саны (172 e2e, 165 db, 138 unit) көп. Сұрақ: 'CI-да жасыл ма?' - нәтижесін GitHub Actions-та қарап растау керек, бұл деректе дәлелденбеген. Сұрақ: 'Тәуелсіз аудит?' - жоқ, тек ішкі аудит (20 мәселе түзетілген).</a:t>
             </a:r>
             <a:endParaRPr lang="en-US" dirty="0"/>
           </a:p>
@@ -2614,7 +2614,7 @@
                 <a:ea typeface="Calibri" pitchFamily="34" charset="-122"/>
                 <a:cs typeface="Calibri" pitchFamily="34" charset="-120"/>
               </a:rPr>
-              <a:t>Инвестор материалы  |  коммит 84918e110  |  2026-10-19</a:t>
+              <a:t>Инвестор материалы  |  коммит f62467243  |  2026-10-19</a:t>
             </a:r>
             <a:endParaRPr lang="en-US" sz="1400" dirty="0"/>
           </a:p>
@@ -11825,7 +11825,7 @@
                 <a:ea typeface="Calibri" pitchFamily="34" charset="-122"/>
                 <a:cs typeface="Calibri" pitchFamily="34" charset="-120"/>
               </a:rPr>
-              <a:t>~10 100</a:t>
+              <a:t>~15 600</a:t>
             </a:r>
             <a:endParaRPr lang="en-US" sz="2800" dirty="0"/>
           </a:p>
@@ -12140,7 +12140,7 @@
                 <a:ea typeface="Calibri" pitchFamily="34" charset="-122"/>
                 <a:cs typeface="Calibri" pitchFamily="34" charset="-120"/>
               </a:rPr>
-              <a:t>16</a:t>
+              <a:t>22</a:t>
             </a:r>
             <a:endParaRPr lang="en-US" sz="2800" dirty="0"/>
           </a:p>

--- a/qazaqcode/public/investors/QazaqCode-pitch.pptx
+++ b/qazaqcode/public/investors/QazaqCode-pitch.pptx
@@ -1145,7 +1145,7 @@
           <a:p>
             <a:r>
               <a:rPr lang="en-US" dirty="0"/>
-              <a:t>Ең маңыздысы - авторлық құқық: репоның коммиттері 'Claude' атынан, код пен контенттің көп бөлігін ИИ жасаған; охрана мен иелік мәртебесін заңгер анықтауы керек (licensing/LEGAL-REVIEW.md §1, AUTHORSHIP.md). Екіншісі - бір адамға тәуелділік. Үшіншісі - кәмелетсіздер деректері бойынша ҚР заңы. Коммерциялық код қазір ашық репода - сатуға дейін жеке репоға көшіру керек. Мұның бәрі docs/INVESTOR.md §6 және деректер бөлмесіндегі RISKS.md-де.</a:t>
+              <a:t>Ең маңыздысы - авторлық құқық: код пен контенттің охрана және иелік мәртебесін заңгер растауы керек (licensing/LEGAL-REVIEW.md §1, AUTHORSHIP.md). Екіншісі - бір адамға тәуелділік. Үшіншісі - кәмелетсіздер деректері бойынша ҚР заңы. Коммерциялық код қазір ашық репода - сатуға дейін жеке репоға көшіру керек. Мұның бәрі docs/INVESTOR.md §6 және деректер бөлмесіндегі RISKS.md-де.</a:t>
             </a:r>
             <a:endParaRPr lang="en-US" dirty="0"/>
           </a:p>
@@ -1233,7 +1233,7 @@
           <a:p>
             <a:r>
               <a:rPr lang="en-US" dirty="0"/>
-              <a:t>Ашық айтамыз: команда - бір адам (Sagid Mustafa). Код пен тесттердің көп бөлігі Claude (Anthropic) ИИ-ассистентімен, негізін қалаушының тапсырмалары мен тексеруі бойынша жасалған; git log-та коммиттер 'Claude' атынан. Бұл IP мәртебесі тұрғысынан тәуекел (12-слайд) және бір адамға тәуелділік. Ұсыныс: пилот табысты болса, бірінші жалдау - қолдау/сату және техникалық серіктес. Қаржыландыруды сомасыз категориямен ғана талқылаймыз.</a:t>
+              <a:t>Ашық айтамыз: команда - бір адам (Sagid Mustafa). Бұл бір адамға тәуелділік тәуекелі (12-слайд). Ұсыныс: пилот табысты болса, бірінші жалдау - қолдау/сату және техникалық серіктес. Қаржыландыруды сомасыз категориямен ғана талқылаймыз.</a:t>
             </a:r>
             <a:endParaRPr lang="en-US" dirty="0"/>
           </a:p>
@@ -1849,7 +1849,7 @@
           <a:p>
             <a:r>
               <a:rPr lang="en-US" dirty="0"/>
-              <a:t>Барлық сан репо мен тесттен: scripts/dataroom.mjs --json. Жолдар: src 15 592 жол, тест коды 8 044 жол. Диаграмма статикалық санау (test()/it() шақырулары), циклмен жасалған тесттер бір рет есептелген, сондықтан соңғы жергілікті жүгіру саны (172 e2e, 165 db, 138 unit) көп. Сұрақ: 'CI-да жасыл ма?' - нәтижесін GitHub Actions-та қарап растау керек, бұл деректе дәлелденбеген. Сұрақ: 'Тәуелсіз аудит?' - жоқ, тек ішкі аудит (20 мәселе түзетілген).</a:t>
+              <a:t>Барлық сан репо мен тесттен: scripts/dataroom.mjs --json. Жолдар: src 15 592 жол, тест коды 8 043 жол. Диаграмма статикалық санау (test()/it() шақырулары), циклмен жасалған тесттер бір рет есептелген, сондықтан соңғы жергілікті жүгіру саны (172 e2e, 165 db, 138 unit) көп. Сұрақ: 'CI-да жасыл ма?' - нәтижесін GitHub Actions-та қарап растау керек, бұл деректе дәлелденбеген. Сұрақ: 'Тәуелсіз аудит?' - жоқ, тек ішкі аудит (20 мәселе түзетілген).</a:t>
             </a:r>
             <a:endParaRPr lang="en-US" dirty="0"/>
           </a:p>
@@ -2614,7 +2614,7 @@
                 <a:ea typeface="Calibri" pitchFamily="34" charset="-122"/>
                 <a:cs typeface="Calibri" pitchFamily="34" charset="-120"/>
               </a:rPr>
-              <a:t>Инвестор материалы  |  коммит f62467243  |  2026-10-19</a:t>
+              <a:t>Инвестор материалы  |  коммит 45eafb7c9  |  2026-10-28</a:t>
             </a:r>
             <a:endParaRPr lang="en-US" sz="1400" dirty="0"/>
           </a:p>
@@ -4586,7 +4586,7 @@
                           <a:ea typeface="Calibri" pitchFamily="34" charset="-122"/>
                           <a:cs typeface="Calibri" pitchFamily="34" charset="-120"/>
                         </a:rPr>
-                        <a:t>Код көбіне ИИ-ассистентпен жасалған; заңгер тексеруі керек</a:t>
+                        <a:t>Заңгер растауы керек</a:t>
                       </a:r>
                       <a:endParaRPr lang="en-US" sz="1300" dirty="0">
                         <a:latin typeface="Calibri" charset="0"/>
@@ -5461,7 +5461,7 @@
                 <a:ea typeface="Calibri" pitchFamily="34" charset="-122"/>
                 <a:cs typeface="Calibri" pitchFamily="34" charset="-120"/>
               </a:rPr>
-              <a:t>Команда: 1 негізін қалаушы + ИИ-ассистент</a:t>
+              <a:t>Команда: 1 негізін қалаушы</a:t>
             </a:r>
             <a:endParaRPr lang="en-US" sz="3000" dirty="0"/>
           </a:p>
@@ -5554,7 +5554,7 @@
         <p:spPr>
           <a:xfrm>
             <a:off x="548640" y="1737360"/>
-            <a:ext cx="5394960" cy="2743200"/>
+            <a:ext cx="11064240" cy="2743200"/>
           </a:xfrm>
           <a:prstGeom prst="roundRect">
             <a:avLst>
@@ -5581,7 +5581,7 @@
         <p:spPr>
           <a:xfrm>
             <a:off x="731520" y="1847088"/>
-            <a:ext cx="5029200" cy="411480"/>
+            <a:ext cx="10698480" cy="411480"/>
           </a:xfrm>
           <a:prstGeom prst="rect">
             <a:avLst/>
@@ -5620,7 +5620,7 @@
         <p:spPr>
           <a:xfrm>
             <a:off x="731520" y="2286000"/>
-            <a:ext cx="5029200" cy="2103120"/>
+            <a:ext cx="10698480" cy="2103120"/>
           </a:xfrm>
           <a:prstGeom prst="rect">
             <a:avLst/>
@@ -5647,7 +5647,7 @@
                 <a:ea typeface="Calibri" pitchFamily="34" charset="-122"/>
                 <a:cs typeface="Calibri" pitchFamily="34" charset="-120"/>
               </a:rPr>
-              <a:t>Sagid Mustafa: идея, өнім құрылымы, талаптар, шешімдерді таңдау, нәтижелерді тексеру және қабылдау.</a:t>
+              <a:t>Sagid Mustafa: идея, өнім құрылымы, талаптар, шешімдер, тексеру және қабылдау.</a:t>
             </a:r>
             <a:endParaRPr lang="en-US" sz="1300" dirty="0"/>
           </a:p>
@@ -5656,114 +5656,6 @@
       <p:sp>
         <p:nvSpPr>
           <p:cNvPr id="11" name="Shape 8"/>
-          <p:cNvSpPr/>
-          <p:nvPr/>
-        </p:nvSpPr>
-        <p:spPr>
-          <a:xfrm>
-            <a:off x="6217920" y="1737360"/>
-            <a:ext cx="5394960" cy="2743200"/>
-          </a:xfrm>
-          <a:prstGeom prst="roundRect">
-            <a:avLst>
-              <a:gd name="adj" fmla="val 2667"/>
-            </a:avLst>
-          </a:prstGeom>
-          <a:solidFill>
-            <a:srgbClr val="F4F6F8"/>
-          </a:solidFill>
-          <a:ln w="12700">
-            <a:solidFill>
-              <a:srgbClr val="E3E8EE"/>
-            </a:solidFill>
-            <a:prstDash val="solid"/>
-          </a:ln>
-        </p:spPr>
-      </p:sp>
-      <p:sp>
-        <p:nvSpPr>
-          <p:cNvPr id="12" name="Text 9"/>
-          <p:cNvSpPr/>
-          <p:nvPr/>
-        </p:nvSpPr>
-        <p:spPr>
-          <a:xfrm>
-            <a:off x="6400800" y="1847088"/>
-            <a:ext cx="5029200" cy="411480"/>
-          </a:xfrm>
-          <a:prstGeom prst="rect">
-            <a:avLst/>
-          </a:prstGeom>
-          <a:noFill/>
-          <a:ln/>
-        </p:spPr>
-        <p:txBody>
-          <a:bodyPr wrap="square" rtlCol="0" anchor="t"/>
-          <a:lstStyle/>
-          <a:p>
-            <a:pPr indent="0" marL="0">
-              <a:buNone/>
-            </a:pPr>
-            <a:r>
-              <a:rPr lang="en-US" sz="1500" b="1" dirty="0">
-                <a:solidFill>
-                  <a:srgbClr val="0E7490"/>
-                </a:solidFill>
-                <a:latin typeface="Calibri" pitchFamily="34" charset="0"/>
-                <a:ea typeface="Calibri" pitchFamily="34" charset="-122"/>
-                <a:cs typeface="Calibri" pitchFamily="34" charset="-120"/>
-              </a:rPr>
-              <a:t>ИИ-ассистент</a:t>
-            </a:r>
-            <a:endParaRPr lang="en-US" sz="1500" dirty="0"/>
-          </a:p>
-        </p:txBody>
-      </p:sp>
-      <p:sp>
-        <p:nvSpPr>
-          <p:cNvPr id="13" name="Text 10"/>
-          <p:cNvSpPr/>
-          <p:nvPr/>
-        </p:nvSpPr>
-        <p:spPr>
-          <a:xfrm>
-            <a:off x="6400800" y="2286000"/>
-            <a:ext cx="5029200" cy="2103120"/>
-          </a:xfrm>
-          <a:prstGeom prst="rect">
-            <a:avLst/>
-          </a:prstGeom>
-          <a:noFill/>
-          <a:ln/>
-        </p:spPr>
-        <p:txBody>
-          <a:bodyPr wrap="square" rtlCol="0" anchor="t"/>
-          <a:lstStyle/>
-          <a:p>
-            <a:pPr indent="0" marL="0">
-              <a:spcAft>
-                <a:spcPts val="400"/>
-              </a:spcAft>
-              <a:buNone/>
-            </a:pPr>
-            <a:r>
-              <a:rPr lang="en-US" sz="1300" dirty="0">
-                <a:solidFill>
-                  <a:srgbClr val="0F172A"/>
-                </a:solidFill>
-                <a:latin typeface="Calibri" pitchFamily="34" charset="0"/>
-                <a:ea typeface="Calibri" pitchFamily="34" charset="-122"/>
-                <a:cs typeface="Calibri" pitchFamily="34" charset="-120"/>
-              </a:rPr>
-              <a:t>Код, тесттер, мәтіндер мен дизайнның көп бөлігін Claude (Anthropic) жасады. Бұл ашық жазылған және IP тәуекелі ретінде көрсетілген.</a:t>
-            </a:r>
-            <a:endParaRPr lang="en-US" sz="1300" dirty="0"/>
-          </a:p>
-        </p:txBody>
-      </p:sp>
-      <p:sp>
-        <p:nvSpPr>
-          <p:cNvPr id="14" name="Shape 11"/>
           <p:cNvSpPr/>
           <p:nvPr/>
         </p:nvSpPr>
@@ -5790,7 +5682,7 @@
       </p:sp>
       <p:sp>
         <p:nvSpPr>
-          <p:cNvPr id="15" name="Text 12"/>
+          <p:cNvPr id="12" name="Text 9"/>
           <p:cNvSpPr/>
           <p:nvPr/>
         </p:nvSpPr>
@@ -5829,7 +5721,7 @@
       </p:sp>
       <p:sp>
         <p:nvSpPr>
-          <p:cNvPr id="16" name="Text 13"/>
+          <p:cNvPr id="13" name="Text 10"/>
           <p:cNvSpPr/>
           <p:nvPr/>
         </p:nvSpPr>
